--- a/assets/pptx/catalog-53.pptx
+++ b/assets/pptx/catalog-53.pptx
@@ -3940,7 +3940,7 @@
                 <a:ea typeface="Ebrima"/>
                 <a:cs typeface="Ebrima"/>
               </a:rPr>
-              <a:t>አናርፍም ወይ ማራናታ (2X)</a:t>
+              <a:t>አናርፍም ወይ ማራናታ 2X</a:t>
             </a:r>
           </a:p>
         </p:txBody>
@@ -4007,7 +4007,7 @@
                 <a:ea typeface="Ebrima"/>
                 <a:cs typeface="Ebrima"/>
               </a:rPr>
-              <a:t>ና ና ና ና ና ማራናታ (4X)</a:t>
+              <a:t>ና ና ና ና ና ማራናታ 4X</a:t>
             </a:r>
           </a:p>
         </p:txBody>
